--- a/classes/parte-4-seguridad-de-aplicaciones-web/112-web-cache-poisoning-y-http-request-smuggling/clase-112-presentacion.pptx
+++ b/classes/parte-4-seguridad-de-aplicaciones-web/112-web-cache-poisoning-y-http-request-smuggling/clase-112-presentacion.pptx
@@ -17,6 +17,9 @@
     <p:sldId id="265" r:id="rId16"/>
     <p:sldId id="266" r:id="rId17"/>
     <p:sldId id="267" r:id="rId18"/>
+    <p:sldId id="268" r:id="rId19"/>
+    <p:sldId id="269" r:id="rId20"/>
+    <p:sldId id="270" r:id="rId21"/>
   </p:sldIdLst>
   <p:sldSz cx="9144000" cy="6858000" type="screen4x3"/>
   <p:notesSz cx="6858000" cy="9144000"/>
@@ -3198,7 +3201,7 @@
                   <a:srgbClr val="0B3D2E"/>
                 </a:solidFill>
               </a:rPr>
-              <a:t>⚠️ Errores comunes</a:t>
+              <a:t>✍️ Ejercicios</a:t>
             </a:r>
           </a:p>
         </p:txBody>
@@ -3236,67 +3239,82 @@
                   <a:srgbClr val="22282E"/>
                 </a:solidFill>
               </a:rPr>
-              <a:t>•  El input no se cachea — Está en la clave o hay Cache-Control: no-store; busca otro header</a:t>
-            </a:r>
-          </a:p>
-          <a:p>
-            <a:pPr>
-              <a:spcAft>
-                <a:spcPts val="600"/>
-              </a:spcAft>
-            </a:pPr>
-            <a:r>
-              <a:rPr sz="1500">
-                <a:solidFill>
-                  <a:srgbClr val="22282E"/>
-                </a:solidFill>
-              </a:rPr>
-              <a:t>•  Smuggling no desincroniza — Ambos usan la misma cabecera; prueba TE.TE con obfuscación</a:t>
-            </a:r>
-          </a:p>
-          <a:p>
-            <a:pPr>
-              <a:spcAft>
-                <a:spcPts val="600"/>
-              </a:spcAft>
-            </a:pPr>
-            <a:r>
-              <a:rPr sz="1500">
-                <a:solidFill>
-                  <a:srgbClr val="22282E"/>
-                </a:solidFill>
-              </a:rPr>
-              <a:t>•  El lab usa HTTP/2 — El vector clásico cambia; usa técnicas de downgrade/H2</a:t>
-            </a:r>
-          </a:p>
-          <a:p>
-            <a:pPr>
-              <a:spcAft>
-                <a:spcPts val="600"/>
-              </a:spcAft>
-            </a:pPr>
-            <a:r>
-              <a:rPr sz="1500">
-                <a:solidFill>
-                  <a:srgbClr val="22282E"/>
-                </a:solidFill>
-              </a:rPr>
-              <a:t>•  Respuestas inconsistentes — Timing sensible; repite y ajusta</a:t>
-            </a:r>
-          </a:p>
-          <a:p>
-            <a:pPr>
-              <a:spcAft>
-                <a:spcPts val="600"/>
-              </a:spcAft>
-            </a:pPr>
-            <a:r>
-              <a:rPr sz="1500">
-                <a:solidFill>
-                  <a:srgbClr val="22282E"/>
-                </a:solidFill>
-              </a:rPr>
-              <a:t>•  Param Miner sin hallazgos — Amplía el diccionario de cabeceras</a:t>
+              <a:t>•  Explica con un diagrama cómo la cache key deja fuera ciertos inputs.</a:t>
+            </a:r>
+          </a:p>
+          <a:p>
+            <a:pPr>
+              <a:spcAft>
+                <a:spcPts val="600"/>
+              </a:spcAft>
+            </a:pPr>
+            <a:r>
+              <a:rPr sz="1500">
+                <a:solidFill>
+                  <a:srgbClr val="22282E"/>
+                </a:solidFill>
+              </a:rPr>
+              <a:t>•  Envenena una cache vía cabecera unkeyed en un lab.</a:t>
+            </a:r>
+          </a:p>
+          <a:p>
+            <a:pPr>
+              <a:spcAft>
+                <a:spcPts val="600"/>
+              </a:spcAft>
+            </a:pPr>
+            <a:r>
+              <a:rPr sz="1500">
+                <a:solidFill>
+                  <a:srgbClr val="22282E"/>
+                </a:solidFill>
+              </a:rPr>
+              <a:t>•  Diferencia CL.TE, TE.CL y TE.TE con ejemplos de peticiones.</a:t>
+            </a:r>
+          </a:p>
+          <a:p>
+            <a:pPr>
+              <a:spcAft>
+                <a:spcPts val="600"/>
+              </a:spcAft>
+            </a:pPr>
+            <a:r>
+              <a:rPr sz="1500">
+                <a:solidFill>
+                  <a:srgbClr val="22282E"/>
+                </a:solidFill>
+              </a:rPr>
+              <a:t>•  Construye a mano una petición de smuggling CL.TE.</a:t>
+            </a:r>
+          </a:p>
+          <a:p>
+            <a:pPr>
+              <a:spcAft>
+                <a:spcPts val="600"/>
+              </a:spcAft>
+            </a:pPr>
+            <a:r>
+              <a:rPr sz="1500">
+                <a:solidFill>
+                  <a:srgbClr val="22282E"/>
+                </a:solidFill>
+              </a:rPr>
+              <a:t>•  Explica cómo HTTP/2 end-to-end mitiga el smuggling clásico.</a:t>
+            </a:r>
+          </a:p>
+          <a:p>
+            <a:pPr>
+              <a:spcAft>
+                <a:spcPts val="600"/>
+              </a:spcAft>
+            </a:pPr>
+            <a:r>
+              <a:rPr sz="1500">
+                <a:solidFill>
+                  <a:srgbClr val="22282E"/>
+                </a:solidFill>
+              </a:rPr>
+              <a:t>•  Propón defensas: normalización en el frontend y rechazo de peticiones ambiguas.</a:t>
             </a:r>
           </a:p>
         </p:txBody>
@@ -3347,7 +3365,7 @@
                   <a:srgbClr val="0B3D2E"/>
                 </a:solidFill>
               </a:rPr>
-              <a:t>❓ Preguntas frecuentes</a:t>
+              <a:t>📝 Reto verificable</a:t>
             </a:r>
           </a:p>
         </p:txBody>
@@ -3385,82 +3403,22 @@
                   <a:srgbClr val="22282E"/>
                 </a:solidFill>
               </a:rPr>
-              <a:t>•  ❓ ¿Por qué el smuggling es tan potente?</a:t>
-            </a:r>
-          </a:p>
-          <a:p>
-            <a:pPr>
-              <a:spcAft>
-                <a:spcPts val="600"/>
-              </a:spcAft>
-            </a:pPr>
-            <a:r>
-              <a:rPr sz="1500">
-                <a:solidFill>
-                  <a:srgbClr val="22282E"/>
-                </a:solidFill>
-              </a:rPr>
-              <a:t>•  Porque puede secuestrar peticiones de otros usuarios, saltar controles del frontend y envenenar respuestas a escala.</a:t>
-            </a:r>
-          </a:p>
-          <a:p>
-            <a:pPr>
-              <a:spcAft>
-                <a:spcPts val="600"/>
-              </a:spcAft>
-            </a:pPr>
-            <a:r>
-              <a:rPr sz="1500">
-                <a:solidFill>
-                  <a:srgbClr val="22282E"/>
-                </a:solidFill>
-              </a:rPr>
-              <a:t>•  ❓ ¿HTTP/2 elimina el smuggling?</a:t>
-            </a:r>
-          </a:p>
-          <a:p>
-            <a:pPr>
-              <a:spcAft>
-                <a:spcPts val="600"/>
-              </a:spcAft>
-            </a:pPr>
-            <a:r>
-              <a:rPr sz="1500">
-                <a:solidFill>
-                  <a:srgbClr val="22282E"/>
-                </a:solidFill>
-              </a:rPr>
-              <a:t>•  El clásico de HTTP/1.1 sí se mitiga con HTTP/2 end-to-end, pero aparecen variantes (H2.CL, downgrade) si hay traducción a HTTP/1.1.</a:t>
-            </a:r>
-          </a:p>
-          <a:p>
-            <a:pPr>
-              <a:spcAft>
-                <a:spcPts val="600"/>
-              </a:spcAft>
-            </a:pPr>
-            <a:r>
-              <a:rPr sz="1500">
-                <a:solidFill>
-                  <a:srgbClr val="22282E"/>
-                </a:solidFill>
-              </a:rPr>
-              <a:t>•  ❓ ¿Qué hace peligroso al cache poisoning?</a:t>
-            </a:r>
-          </a:p>
-          <a:p>
-            <a:pPr>
-              <a:spcAft>
-                <a:spcPts val="600"/>
-              </a:spcAft>
-            </a:pPr>
-            <a:r>
-              <a:rPr sz="1500">
-                <a:solidFill>
-                  <a:srgbClr val="22282E"/>
-                </a:solidFill>
-              </a:rPr>
-              <a:t>•  Que un solo input malicioso, una vez cacheado, se sirve a todos los usuarios que piden esa URL.</a:t>
+              <a:t>•  Resuelve un lab de HTTP request smuggling de PortSwigger (CL.TE o TE.CL) y un lab de cache poisoning, demostrando impacto en ambos.</a:t>
+            </a:r>
+          </a:p>
+          <a:p>
+            <a:pPr>
+              <a:spcAft>
+                <a:spcPts val="600"/>
+              </a:spcAft>
+            </a:pPr>
+            <a:r>
+              <a:rPr sz="1500">
+                <a:solidFill>
+                  <a:srgbClr val="22282E"/>
+                </a:solidFill>
+              </a:rPr>
+              <a:t>•  Criterio de aceptación: ambos labs quedan resueltos, entregas las peticiones exactas (cabeceras conflictivas / input unkeyed), la evidencia del impacto y la defensa correspondiente.</a:t>
             </a:r>
           </a:p>
         </p:txBody>
@@ -3511,7 +3469,7 @@
                   <a:srgbClr val="0B3D2E"/>
                 </a:solidFill>
               </a:rPr>
-              <a:t>🔗 Referencias</a:t>
+              <a:t>⚠️ Errores comunes</a:t>
             </a:r>
           </a:p>
         </p:txBody>
@@ -3549,6 +3507,319 @@
                   <a:srgbClr val="22282E"/>
                 </a:solidFill>
               </a:rPr>
+              <a:t>•  El input no se cachea — Está en la clave o hay Cache-Control: no-store; busca otro header</a:t>
+            </a:r>
+          </a:p>
+          <a:p>
+            <a:pPr>
+              <a:spcAft>
+                <a:spcPts val="600"/>
+              </a:spcAft>
+            </a:pPr>
+            <a:r>
+              <a:rPr sz="1500">
+                <a:solidFill>
+                  <a:srgbClr val="22282E"/>
+                </a:solidFill>
+              </a:rPr>
+              <a:t>•  Smuggling no desincroniza — Ambos usan la misma cabecera; prueba TE.TE con obfuscación</a:t>
+            </a:r>
+          </a:p>
+          <a:p>
+            <a:pPr>
+              <a:spcAft>
+                <a:spcPts val="600"/>
+              </a:spcAft>
+            </a:pPr>
+            <a:r>
+              <a:rPr sz="1500">
+                <a:solidFill>
+                  <a:srgbClr val="22282E"/>
+                </a:solidFill>
+              </a:rPr>
+              <a:t>•  El lab usa HTTP/2 — El vector clásico cambia; usa técnicas de downgrade/H2</a:t>
+            </a:r>
+          </a:p>
+          <a:p>
+            <a:pPr>
+              <a:spcAft>
+                <a:spcPts val="600"/>
+              </a:spcAft>
+            </a:pPr>
+            <a:r>
+              <a:rPr sz="1500">
+                <a:solidFill>
+                  <a:srgbClr val="22282E"/>
+                </a:solidFill>
+              </a:rPr>
+              <a:t>•  Respuestas inconsistentes — Timing sensible; repite y ajusta</a:t>
+            </a:r>
+          </a:p>
+          <a:p>
+            <a:pPr>
+              <a:spcAft>
+                <a:spcPts val="600"/>
+              </a:spcAft>
+            </a:pPr>
+            <a:r>
+              <a:rPr sz="1500">
+                <a:solidFill>
+                  <a:srgbClr val="22282E"/>
+                </a:solidFill>
+              </a:rPr>
+              <a:t>•  Param Miner sin hallazgos — Amplía el diccionario de cabeceras</a:t>
+            </a:r>
+          </a:p>
+        </p:txBody>
+      </p:sp>
+    </p:spTree>
+  </p:cSld>
+  <p:clrMapOvr>
+    <a:masterClrMapping/>
+  </p:clrMapOvr>
+</p:sld>
+</file>
+
+<file path=ppt/slides/slide13.xml><?xml version="1.0" encoding="utf-8"?>
+<p:sld xmlns:a="http://schemas.openxmlformats.org/drawingml/2006/main" xmlns:p="http://schemas.openxmlformats.org/presentationml/2006/main" xmlns:r="http://schemas.openxmlformats.org/officeDocument/2006/relationships">
+  <p:cSld>
+    <p:spTree>
+      <p:nvGrpSpPr>
+        <p:cNvPr id="1" name=""/>
+        <p:cNvGrpSpPr/>
+        <p:nvPr/>
+      </p:nvGrpSpPr>
+      <p:grpSpPr/>
+      <p:sp>
+        <p:nvSpPr>
+          <p:cNvPr id="2" name="TextBox 1"/>
+          <p:cNvSpPr txBox="1"/>
+          <p:nvPr/>
+        </p:nvSpPr>
+        <p:spPr>
+          <a:xfrm>
+            <a:off x="457200" y="320040"/>
+            <a:ext cx="8229600" cy="822960"/>
+          </a:xfrm>
+          <a:prstGeom prst="rect">
+            <a:avLst/>
+          </a:prstGeom>
+          <a:noFill/>
+        </p:spPr>
+        <p:txBody>
+          <a:bodyPr wrap="square">
+            <a:spAutoFit/>
+          </a:bodyPr>
+          <a:lstStyle/>
+          <a:p>
+            <a:r>
+              <a:rPr sz="2600" b="1">
+                <a:solidFill>
+                  <a:srgbClr val="0B3D2E"/>
+                </a:solidFill>
+              </a:rPr>
+              <a:t>❓ Preguntas frecuentes</a:t>
+            </a:r>
+          </a:p>
+        </p:txBody>
+      </p:sp>
+      <p:sp>
+        <p:nvSpPr>
+          <p:cNvPr id="3" name="TextBox 2"/>
+          <p:cNvSpPr txBox="1"/>
+          <p:nvPr/>
+        </p:nvSpPr>
+        <p:spPr>
+          <a:xfrm>
+            <a:off x="457200" y="1280160"/>
+            <a:ext cx="8229600" cy="4937760"/>
+          </a:xfrm>
+          <a:prstGeom prst="rect">
+            <a:avLst/>
+          </a:prstGeom>
+          <a:noFill/>
+        </p:spPr>
+        <p:txBody>
+          <a:bodyPr wrap="square">
+            <a:spAutoFit/>
+          </a:bodyPr>
+          <a:lstStyle/>
+          <a:p>
+            <a:pPr>
+              <a:spcAft>
+                <a:spcPts val="600"/>
+              </a:spcAft>
+            </a:pPr>
+            <a:r>
+              <a:rPr sz="1500">
+                <a:solidFill>
+                  <a:srgbClr val="22282E"/>
+                </a:solidFill>
+              </a:rPr>
+              <a:t>•  ❓ ¿Por qué el smuggling es tan potente?</a:t>
+            </a:r>
+          </a:p>
+          <a:p>
+            <a:pPr>
+              <a:spcAft>
+                <a:spcPts val="600"/>
+              </a:spcAft>
+            </a:pPr>
+            <a:r>
+              <a:rPr sz="1500">
+                <a:solidFill>
+                  <a:srgbClr val="22282E"/>
+                </a:solidFill>
+              </a:rPr>
+              <a:t>•  Porque puede secuestrar peticiones de otros usuarios, saltar controles del frontend y envenenar respuestas a escala.</a:t>
+            </a:r>
+          </a:p>
+          <a:p>
+            <a:pPr>
+              <a:spcAft>
+                <a:spcPts val="600"/>
+              </a:spcAft>
+            </a:pPr>
+            <a:r>
+              <a:rPr sz="1500">
+                <a:solidFill>
+                  <a:srgbClr val="22282E"/>
+                </a:solidFill>
+              </a:rPr>
+              <a:t>•  ❓ ¿HTTP/2 elimina el smuggling?</a:t>
+            </a:r>
+          </a:p>
+          <a:p>
+            <a:pPr>
+              <a:spcAft>
+                <a:spcPts val="600"/>
+              </a:spcAft>
+            </a:pPr>
+            <a:r>
+              <a:rPr sz="1500">
+                <a:solidFill>
+                  <a:srgbClr val="22282E"/>
+                </a:solidFill>
+              </a:rPr>
+              <a:t>•  El clásico de HTTP/1.1 sí se mitiga con HTTP/2 end-to-end, pero aparecen variantes (H2.CL, downgrade) si hay traducción a HTTP/1.1.</a:t>
+            </a:r>
+          </a:p>
+          <a:p>
+            <a:pPr>
+              <a:spcAft>
+                <a:spcPts val="600"/>
+              </a:spcAft>
+            </a:pPr>
+            <a:r>
+              <a:rPr sz="1500">
+                <a:solidFill>
+                  <a:srgbClr val="22282E"/>
+                </a:solidFill>
+              </a:rPr>
+              <a:t>•  ❓ ¿Qué hace peligroso al cache poisoning?</a:t>
+            </a:r>
+          </a:p>
+          <a:p>
+            <a:pPr>
+              <a:spcAft>
+                <a:spcPts val="600"/>
+              </a:spcAft>
+            </a:pPr>
+            <a:r>
+              <a:rPr sz="1500">
+                <a:solidFill>
+                  <a:srgbClr val="22282E"/>
+                </a:solidFill>
+              </a:rPr>
+              <a:t>•  Que un solo input malicioso, una vez cacheado, se sirve a todos los usuarios que piden esa URL.</a:t>
+            </a:r>
+          </a:p>
+        </p:txBody>
+      </p:sp>
+    </p:spTree>
+  </p:cSld>
+  <p:clrMapOvr>
+    <a:masterClrMapping/>
+  </p:clrMapOvr>
+</p:sld>
+</file>
+
+<file path=ppt/slides/slide14.xml><?xml version="1.0" encoding="utf-8"?>
+<p:sld xmlns:a="http://schemas.openxmlformats.org/drawingml/2006/main" xmlns:p="http://schemas.openxmlformats.org/presentationml/2006/main" xmlns:r="http://schemas.openxmlformats.org/officeDocument/2006/relationships">
+  <p:cSld>
+    <p:spTree>
+      <p:nvGrpSpPr>
+        <p:cNvPr id="1" name=""/>
+        <p:cNvGrpSpPr/>
+        <p:nvPr/>
+      </p:nvGrpSpPr>
+      <p:grpSpPr/>
+      <p:sp>
+        <p:nvSpPr>
+          <p:cNvPr id="2" name="TextBox 1"/>
+          <p:cNvSpPr txBox="1"/>
+          <p:nvPr/>
+        </p:nvSpPr>
+        <p:spPr>
+          <a:xfrm>
+            <a:off x="457200" y="320040"/>
+            <a:ext cx="8229600" cy="822960"/>
+          </a:xfrm>
+          <a:prstGeom prst="rect">
+            <a:avLst/>
+          </a:prstGeom>
+          <a:noFill/>
+        </p:spPr>
+        <p:txBody>
+          <a:bodyPr wrap="square">
+            <a:spAutoFit/>
+          </a:bodyPr>
+          <a:lstStyle/>
+          <a:p>
+            <a:r>
+              <a:rPr sz="2600" b="1">
+                <a:solidFill>
+                  <a:srgbClr val="0B3D2E"/>
+                </a:solidFill>
+              </a:rPr>
+              <a:t>🔗 Referencias</a:t>
+            </a:r>
+          </a:p>
+        </p:txBody>
+      </p:sp>
+      <p:sp>
+        <p:nvSpPr>
+          <p:cNvPr id="3" name="TextBox 2"/>
+          <p:cNvSpPr txBox="1"/>
+          <p:nvPr/>
+        </p:nvSpPr>
+        <p:spPr>
+          <a:xfrm>
+            <a:off x="457200" y="1280160"/>
+            <a:ext cx="8229600" cy="4937760"/>
+          </a:xfrm>
+          <a:prstGeom prst="rect">
+            <a:avLst/>
+          </a:prstGeom>
+          <a:noFill/>
+        </p:spPr>
+        <p:txBody>
+          <a:bodyPr wrap="square">
+            <a:spAutoFit/>
+          </a:bodyPr>
+          <a:lstStyle/>
+          <a:p>
+            <a:pPr>
+              <a:spcAft>
+                <a:spcPts val="600"/>
+              </a:spcAft>
+            </a:pPr>
+            <a:r>
+              <a:rPr sz="1500">
+                <a:solidFill>
+                  <a:srgbClr val="22282E"/>
+                </a:solidFill>
+              </a:rPr>
               <a:t>•  PortSwigger — HTTP request smuggling: &lt;https://portswigger.net/web-security/request-smuggling&gt;</a:t>
             </a:r>
           </a:p>
@@ -3599,6 +3870,81 @@
           </a:p>
         </p:txBody>
       </p:sp>
+    </p:spTree>
+  </p:cSld>
+  <p:clrMapOvr>
+    <a:masterClrMapping/>
+  </p:clrMapOvr>
+</p:sld>
+</file>
+
+<file path=ppt/slides/slide15.xml><?xml version="1.0" encoding="utf-8"?>
+<p:sld xmlns:a="http://schemas.openxmlformats.org/drawingml/2006/main" xmlns:p="http://schemas.openxmlformats.org/presentationml/2006/main" xmlns:r="http://schemas.openxmlformats.org/officeDocument/2006/relationships">
+  <p:cSld>
+    <p:spTree>
+      <p:nvGrpSpPr>
+        <p:cNvPr id="1" name=""/>
+        <p:cNvGrpSpPr/>
+        <p:nvPr/>
+      </p:nvGrpSpPr>
+      <p:grpSpPr/>
+      <p:sp>
+        <p:nvSpPr>
+          <p:cNvPr id="2" name="TextBox 1"/>
+          <p:cNvSpPr txBox="1"/>
+          <p:nvPr/>
+        </p:nvSpPr>
+        <p:spPr>
+          <a:xfrm>
+            <a:off x="457200" y="274320"/>
+            <a:ext cx="8229600" cy="640080"/>
+          </a:xfrm>
+          <a:prstGeom prst="rect">
+            <a:avLst/>
+          </a:prstGeom>
+          <a:noFill/>
+        </p:spPr>
+        <p:txBody>
+          <a:bodyPr wrap="square">
+            <a:spAutoFit/>
+          </a:bodyPr>
+          <a:lstStyle/>
+          <a:p>
+            <a:r>
+              <a:rPr sz="2200" b="1">
+                <a:solidFill>
+                  <a:srgbClr val="0B3D2E"/>
+                </a:solidFill>
+              </a:rPr>
+              <a:t>Diagrama de la clase</a:t>
+            </a:r>
+          </a:p>
+        </p:txBody>
+      </p:sp>
+      <p:pic>
+        <p:nvPicPr>
+          <p:cNvPr id="3" name="Picture 2" descr="248964af69815694.png"/>
+          <p:cNvPicPr>
+            <a:picLocks noChangeAspect="1"/>
+          </p:cNvPicPr>
+          <p:nvPr/>
+        </p:nvPicPr>
+        <p:blipFill>
+          <a:blip r:embed="rId2"/>
+          <a:stretch>
+            <a:fillRect/>
+          </a:stretch>
+        </p:blipFill>
+        <p:spPr>
+          <a:xfrm>
+            <a:off x="457200" y="3429000"/>
+            <a:ext cx="8229600" cy="640080"/>
+          </a:xfrm>
+          <a:prstGeom prst="rect">
+            <a:avLst/>
+          </a:prstGeom>
+        </p:spPr>
+      </p:pic>
     </p:spTree>
   </p:cSld>
   <p:clrMapOvr>
@@ -3683,7 +4029,7 @@
                   <a:srgbClr val="22282E"/>
                 </a:solidFill>
               </a:rPr>
-              <a:t>•  Explotar dos ataques avanzados a nivel de protocolo e infraestructura: el web cache poisoning, que envenena respuestas cacheadas para afectar a muchos usuarios, y el HTTP request smuggling, que abusa de discrepancias entre servidores frontend y backend al interpretar los límites de una petición. Son técnicas de alto nivel, muy premiadas en bug bounty.</a:t>
+              <a:t>•  Explotar dos ataques avanzados a nivel de protocolo e infraestructura: el web cache poisoning, que envenena respuestas cacheadas para afectar a muchos usuarios, y el HTTP request smuggling, que abusa…</a:t>
             </a:r>
           </a:p>
         </p:txBody>
@@ -4077,7 +4423,7 @@
                   <a:srgbClr val="0B3D2E"/>
                 </a:solidFill>
               </a:rPr>
-              <a:t>📖 Definiciones y características</a:t>
+              <a:t>🧠 Explicación en profundidad</a:t>
             </a:r>
           </a:p>
         </p:txBody>
@@ -4115,82 +4461,97 @@
                   <a:srgbClr val="22282E"/>
                 </a:solidFill>
               </a:rPr>
-              <a:t>•  Web cache poisoning: inyectar contenido en una respuesta cacheada que se sirve a otros usuarios. Característica: amplifica un input a muchas víctimas.</a:t>
-            </a:r>
-          </a:p>
-          <a:p>
-            <a:pPr>
-              <a:spcAft>
-                <a:spcPts val="600"/>
-              </a:spcAft>
-            </a:pPr>
-            <a:r>
-              <a:rPr sz="1500">
-                <a:solidFill>
-                  <a:srgbClr val="22282E"/>
-                </a:solidFill>
-              </a:rPr>
-              <a:t>•  Cache key: conjunto de campos que identifican una respuesta en cache. Característica: los inputs no incluidos (unkeyed) son el vector.</a:t>
-            </a:r>
-          </a:p>
-          <a:p>
-            <a:pPr>
-              <a:spcAft>
-                <a:spcPts val="600"/>
-              </a:spcAft>
-            </a:pPr>
-            <a:r>
-              <a:rPr sz="1500">
-                <a:solidFill>
-                  <a:srgbClr val="22282E"/>
-                </a:solidFill>
-              </a:rPr>
-              <a:t>•  HTTP request smuggling: aprovechar que frontend y backend delimitan las peticiones de forma distinta. Característica: "contrabandea" una petición dentro de otra.</a:t>
-            </a:r>
-          </a:p>
-          <a:p>
-            <a:pPr>
-              <a:spcAft>
-                <a:spcPts val="600"/>
-              </a:spcAft>
-            </a:pPr>
-            <a:r>
-              <a:rPr sz="1500">
-                <a:solidFill>
-                  <a:srgbClr val="22282E"/>
-                </a:solidFill>
-              </a:rPr>
-              <a:t>•  CL.TE / TE.CL: discrepancia entre Content-Length y Transfer-Encoding. Característica: cada extremo usa una cabecera distinta.</a:t>
-            </a:r>
-          </a:p>
-          <a:p>
-            <a:pPr>
-              <a:spcAft>
-                <a:spcPts val="600"/>
-              </a:spcAft>
-            </a:pPr>
-            <a:r>
-              <a:rPr sz="1500">
-                <a:solidFill>
-                  <a:srgbClr val="22282E"/>
-                </a:solidFill>
-              </a:rPr>
-              <a:t>•  TE.TE: ambos usan Transfer-Encoding pero uno se ofusca. Característica: se evade con obfuscación del header.</a:t>
-            </a:r>
-          </a:p>
-          <a:p>
-            <a:pPr>
-              <a:spcAft>
-                <a:spcPts val="600"/>
-              </a:spcAft>
-            </a:pPr>
-            <a:r>
-              <a:rPr sz="1500">
-                <a:solidFill>
-                  <a:srgbClr val="22282E"/>
-                </a:solidFill>
-              </a:rPr>
-              <a:t>•  Response queue poisoning: desalinear respuestas para servir la de otro usuario. Característica: impacto grave del smuggling.</a:t>
+              <a:t>•  Esta clase reúne dos vulnerabilidades avanzadas que comparten una idea profunda: en una cadena de</a:t>
+            </a:r>
+          </a:p>
+          <a:p>
+            <a:pPr>
+              <a:spcAft>
+                <a:spcPts val="600"/>
+              </a:spcAft>
+            </a:pPr>
+            <a:r>
+              <a:rPr sz="1500">
+                <a:solidFill>
+                  <a:srgbClr val="22282E"/>
+                </a:solidFill>
+              </a:rPr>
+              <a:t>•  servidores (CDN, proxy, balanceador, backend), distintas máquinas pueden interpretar la misma</a:t>
+            </a:r>
+          </a:p>
+          <a:p>
+            <a:pPr>
+              <a:spcAft>
+                <a:spcPts val="600"/>
+              </a:spcAft>
+            </a:pPr>
+            <a:r>
+              <a:rPr sz="1500">
+                <a:solidFill>
+                  <a:srgbClr val="22282E"/>
+                </a:solidFill>
+              </a:rPr>
+              <a:t>•  petición HTTP de forma diferente, y esa discrepancia es explotable. Son ataques sofisticados,</a:t>
+            </a:r>
+          </a:p>
+          <a:p>
+            <a:pPr>
+              <a:spcAft>
+                <a:spcPts val="600"/>
+              </a:spcAft>
+            </a:pPr>
+            <a:r>
+              <a:rPr sz="1500">
+                <a:solidFill>
+                  <a:srgbClr val="22282E"/>
+                </a:solidFill>
+              </a:rPr>
+              <a:t>•  popularizados por la investigación de James Kettle (PortSwigger), y entenderlos requiere pensar en la</a:t>
+            </a:r>
+          </a:p>
+          <a:p>
+            <a:pPr>
+              <a:spcAft>
+                <a:spcPts val="600"/>
+              </a:spcAft>
+            </a:pPr>
+            <a:r>
+              <a:rPr sz="1500">
+                <a:solidFill>
+                  <a:srgbClr val="22282E"/>
+                </a:solidFill>
+              </a:rPr>
+              <a:t>•  cadena de la clase 086, no en un servidor aislado.</a:t>
+            </a:r>
+          </a:p>
+          <a:p>
+            <a:pPr>
+              <a:spcAft>
+                <a:spcPts val="600"/>
+              </a:spcAft>
+            </a:pPr>
+            <a:r>
+              <a:rPr sz="1500">
+                <a:solidFill>
+                  <a:srgbClr val="22282E"/>
+                </a:solidFill>
+              </a:rPr>
+              <a:t>•  Una caché guarda una respuesta y la sirve a muchos usuarios para acelerar. Decide qué respuesta</a:t>
+            </a:r>
+          </a:p>
+          <a:p>
+            <a:pPr>
+              <a:spcAft>
+                <a:spcPts val="600"/>
+              </a:spcAft>
+            </a:pPr>
+            <a:r>
+              <a:rPr sz="1500">
+                <a:solidFill>
+                  <a:srgbClr val="22282E"/>
+                </a:solidFill>
+              </a:rPr>
+              <a:t>•  corresponde a qué petición mediante una clave de caché, normalmente la URL y algunas cabeceras. El</a:t>
             </a:r>
           </a:p>
         </p:txBody>
@@ -4241,7 +4602,7 @@
                   <a:srgbClr val="0B3D2E"/>
                 </a:solidFill>
               </a:rPr>
-              <a:t>🧰 Herramientas y preparación</a:t>
+              <a:t>📖 Definiciones y características</a:t>
             </a:r>
           </a:p>
         </p:txBody>
@@ -4279,37 +4640,82 @@
                   <a:srgbClr val="22282E"/>
                 </a:solidFill>
               </a:rPr>
-              <a:t>•  PortSwigger labs de request smuggling y cache poisoning.</a:t>
-            </a:r>
-          </a:p>
-          <a:p>
-            <a:pPr>
-              <a:spcAft>
-                <a:spcPts val="600"/>
-              </a:spcAft>
-            </a:pPr>
-            <a:r>
-              <a:rPr sz="1500">
-                <a:solidFill>
-                  <a:srgbClr val="22282E"/>
-                </a:solidFill>
-              </a:rPr>
-              <a:t>•  Burp con la extensión HTTP Request Smuggler y Param Miner.</a:t>
-            </a:r>
-          </a:p>
-          <a:p>
-            <a:pPr>
-              <a:spcAft>
-                <a:spcPts val="600"/>
-              </a:spcAft>
-            </a:pPr>
-            <a:r>
-              <a:rPr sz="1500">
-                <a:solidFill>
-                  <a:srgbClr val="22282E"/>
-                </a:solidFill>
-              </a:rPr>
-              <a:t>•  Comprensión de HTTP/1.1 y HTTP/2.</a:t>
+              <a:t>•  Web cache poisoning: inyectar contenido en una respuesta cacheada que se sirve a otros usuarios. Característica: amplifica un input a muchas víctimas.</a:t>
+            </a:r>
+          </a:p>
+          <a:p>
+            <a:pPr>
+              <a:spcAft>
+                <a:spcPts val="600"/>
+              </a:spcAft>
+            </a:pPr>
+            <a:r>
+              <a:rPr sz="1500">
+                <a:solidFill>
+                  <a:srgbClr val="22282E"/>
+                </a:solidFill>
+              </a:rPr>
+              <a:t>•  Cache key: conjunto de campos que identifican una respuesta en cache. Característica: los inputs no incluidos (unkeyed) son el vector.</a:t>
+            </a:r>
+          </a:p>
+          <a:p>
+            <a:pPr>
+              <a:spcAft>
+                <a:spcPts val="600"/>
+              </a:spcAft>
+            </a:pPr>
+            <a:r>
+              <a:rPr sz="1500">
+                <a:solidFill>
+                  <a:srgbClr val="22282E"/>
+                </a:solidFill>
+              </a:rPr>
+              <a:t>•  HTTP request smuggling: aprovechar que frontend y backend delimitan las peticiones de forma distinta. Característica: "contrabandea" una petición dentro de otra.</a:t>
+            </a:r>
+          </a:p>
+          <a:p>
+            <a:pPr>
+              <a:spcAft>
+                <a:spcPts val="600"/>
+              </a:spcAft>
+            </a:pPr>
+            <a:r>
+              <a:rPr sz="1500">
+                <a:solidFill>
+                  <a:srgbClr val="22282E"/>
+                </a:solidFill>
+              </a:rPr>
+              <a:t>•  CL.TE / TE.CL: discrepancia entre Content-Length y Transfer-Encoding. Característica: cada extremo usa una cabecera distinta.</a:t>
+            </a:r>
+          </a:p>
+          <a:p>
+            <a:pPr>
+              <a:spcAft>
+                <a:spcPts val="600"/>
+              </a:spcAft>
+            </a:pPr>
+            <a:r>
+              <a:rPr sz="1500">
+                <a:solidFill>
+                  <a:srgbClr val="22282E"/>
+                </a:solidFill>
+              </a:rPr>
+              <a:t>•  TE.TE: ambos usan Transfer-Encoding pero uno se ofusca. Característica: se evade con obfuscación del header.</a:t>
+            </a:r>
+          </a:p>
+          <a:p>
+            <a:pPr>
+              <a:spcAft>
+                <a:spcPts val="600"/>
+              </a:spcAft>
+            </a:pPr>
+            <a:r>
+              <a:rPr sz="1500">
+                <a:solidFill>
+                  <a:srgbClr val="22282E"/>
+                </a:solidFill>
+              </a:rPr>
+              <a:t>•  Response queue poisoning: desalinear respuestas para servir la de otro usuario. Característica: impacto grave del smuggling.</a:t>
             </a:r>
           </a:p>
         </p:txBody>
@@ -4360,7 +4766,7 @@
                   <a:srgbClr val="0B3D2E"/>
                 </a:solidFill>
               </a:rPr>
-              <a:t>🧪 Laboratorio guiado</a:t>
+              <a:t>📔 Glosario</a:t>
             </a:r>
           </a:p>
         </p:txBody>
@@ -4398,97 +4804,97 @@
                   <a:srgbClr val="22282E"/>
                 </a:solidFill>
               </a:rPr>
-              <a:t>•  Cache poisoning: usa Param Miner para descubrir cabeceras no incluidas en la clave (unkeyed).</a:t>
-            </a:r>
-          </a:p>
-          <a:p>
-            <a:pPr>
-              <a:spcAft>
-                <a:spcPts val="600"/>
-              </a:spcAft>
-            </a:pPr>
-            <a:r>
-              <a:rPr sz="1500">
-                <a:solidFill>
-                  <a:srgbClr val="22282E"/>
-                </a:solidFill>
-              </a:rPr>
-              <a:t>•  Inyecta un valor malicioso en esa cabecera y comprueba si se refleja y se cachea.</a:t>
-            </a:r>
-          </a:p>
-          <a:p>
-            <a:pPr>
-              <a:spcAft>
-                <a:spcPts val="600"/>
-              </a:spcAft>
-            </a:pPr>
-            <a:r>
-              <a:rPr sz="1500">
-                <a:solidFill>
-                  <a:srgbClr val="22282E"/>
-                </a:solidFill>
-              </a:rPr>
-              <a:t>•  Verifica el envenenamiento accediendo a la URL sin la cabecera (recibes el contenido inyectado).</a:t>
-            </a:r>
-          </a:p>
-          <a:p>
-            <a:pPr>
-              <a:spcAft>
-                <a:spcPts val="600"/>
-              </a:spcAft>
-            </a:pPr>
-            <a:r>
-              <a:rPr sz="1500">
-                <a:solidFill>
-                  <a:srgbClr val="22282E"/>
-                </a:solidFill>
-              </a:rPr>
-              <a:t>•  Request smuggling: con HTTP Request Smuggler, detecta la desincronización (CL.TE/TE.CL).</a:t>
-            </a:r>
-          </a:p>
-          <a:p>
-            <a:pPr>
-              <a:spcAft>
-                <a:spcPts val="600"/>
-              </a:spcAft>
-            </a:pPr>
-            <a:r>
-              <a:rPr sz="1500">
-                <a:solidFill>
-                  <a:srgbClr val="22282E"/>
-                </a:solidFill>
-              </a:rPr>
-              <a:t>•  Construye manualmente una petición con Content-Length y Transfer-Encoding conflictivos para "contrabandear" una segunda petición.</a:t>
-            </a:r>
-          </a:p>
-          <a:p>
-            <a:pPr>
-              <a:spcAft>
-                <a:spcPts val="600"/>
-              </a:spcAft>
-            </a:pPr>
-            <a:r>
-              <a:rPr sz="1500">
-                <a:solidFill>
-                  <a:srgbClr val="22282E"/>
-                </a:solidFill>
-              </a:rPr>
-              <a:t>•  Demuestra el impacto: captura la petición de otro usuario o envenena la cola de respuestas en el lab.</a:t>
-            </a:r>
-          </a:p>
-          <a:p>
-            <a:pPr>
-              <a:spcAft>
-                <a:spcPts val="600"/>
-              </a:spcAft>
-            </a:pPr>
-            <a:r>
-              <a:rPr sz="1500">
-                <a:solidFill>
-                  <a:srgbClr val="22282E"/>
-                </a:solidFill>
-              </a:rPr>
-              <a:t>•  Documenta el tipo de desincronización, el payload y el impacto.</a:t>
+              <a:t>•  Término — Definición concisa</a:t>
+            </a:r>
+          </a:p>
+          <a:p>
+            <a:pPr>
+              <a:spcAft>
+                <a:spcPts val="600"/>
+              </a:spcAft>
+            </a:pPr>
+            <a:r>
+              <a:rPr sz="1500">
+                <a:solidFill>
+                  <a:srgbClr val="22282E"/>
+                </a:solidFill>
+              </a:rPr>
+              <a:t>•  Caché web — Guarda respuestas y las sirve a muchos usuarios</a:t>
+            </a:r>
+          </a:p>
+          <a:p>
+            <a:pPr>
+              <a:spcAft>
+                <a:spcPts val="600"/>
+              </a:spcAft>
+            </a:pPr>
+            <a:r>
+              <a:rPr sz="1500">
+                <a:solidFill>
+                  <a:srgbClr val="22282E"/>
+                </a:solidFill>
+              </a:rPr>
+              <a:t>•  Clave de caché — URL y cabeceras que identifican qué respuesta corresponde</a:t>
+            </a:r>
+          </a:p>
+          <a:p>
+            <a:pPr>
+              <a:spcAft>
+                <a:spcPts val="600"/>
+              </a:spcAft>
+            </a:pPr>
+            <a:r>
+              <a:rPr sz="1500">
+                <a:solidFill>
+                  <a:srgbClr val="22282E"/>
+                </a:solidFill>
+              </a:rPr>
+              <a:t>•  Unkeyed input — Entrada que afecta a la respuesta pero no a la clave</a:t>
+            </a:r>
+          </a:p>
+          <a:p>
+            <a:pPr>
+              <a:spcAft>
+                <a:spcPts val="600"/>
+              </a:spcAft>
+            </a:pPr>
+            <a:r>
+              <a:rPr sz="1500">
+                <a:solidFill>
+                  <a:srgbClr val="22282E"/>
+                </a:solidFill>
+              </a:rPr>
+              <a:t>•  Cache poisoning — Almacenar una respuesta maliciosa que se sirve a todos</a:t>
+            </a:r>
+          </a:p>
+          <a:p>
+            <a:pPr>
+              <a:spcAft>
+                <a:spcPts val="600"/>
+              </a:spcAft>
+            </a:pPr>
+            <a:r>
+              <a:rPr sz="1500">
+                <a:solidFill>
+                  <a:srgbClr val="22282E"/>
+                </a:solidFill>
+              </a:rPr>
+              <a:t>•  Request smuggling — Colar parte de una petición en la de otro usuario</a:t>
+            </a:r>
+          </a:p>
+          <a:p>
+            <a:pPr>
+              <a:spcAft>
+                <a:spcPts val="600"/>
+              </a:spcAft>
+            </a:pPr>
+            <a:r>
+              <a:rPr sz="1500">
+                <a:solidFill>
+                  <a:srgbClr val="22282E"/>
+                </a:solidFill>
+              </a:rPr>
+              <a:t>•  Content-Length (CL) — Cabecera que indica la longitud del cuerpo en bytes</a:t>
             </a:r>
           </a:p>
         </p:txBody>
@@ -4539,7 +4945,7 @@
                   <a:srgbClr val="0B3D2E"/>
                 </a:solidFill>
               </a:rPr>
-              <a:t>✍️ Ejercicios</a:t>
+              <a:t>🧰 Herramientas y preparación</a:t>
             </a:r>
           </a:p>
         </p:txBody>
@@ -4577,82 +4983,37 @@
                   <a:srgbClr val="22282E"/>
                 </a:solidFill>
               </a:rPr>
-              <a:t>•  Explica con un diagrama cómo la cache key deja fuera ciertos inputs.</a:t>
-            </a:r>
-          </a:p>
-          <a:p>
-            <a:pPr>
-              <a:spcAft>
-                <a:spcPts val="600"/>
-              </a:spcAft>
-            </a:pPr>
-            <a:r>
-              <a:rPr sz="1500">
-                <a:solidFill>
-                  <a:srgbClr val="22282E"/>
-                </a:solidFill>
-              </a:rPr>
-              <a:t>•  Envenena una cache vía cabecera unkeyed en un lab.</a:t>
-            </a:r>
-          </a:p>
-          <a:p>
-            <a:pPr>
-              <a:spcAft>
-                <a:spcPts val="600"/>
-              </a:spcAft>
-            </a:pPr>
-            <a:r>
-              <a:rPr sz="1500">
-                <a:solidFill>
-                  <a:srgbClr val="22282E"/>
-                </a:solidFill>
-              </a:rPr>
-              <a:t>•  Diferencia CL.TE, TE.CL y TE.TE con ejemplos de peticiones.</a:t>
-            </a:r>
-          </a:p>
-          <a:p>
-            <a:pPr>
-              <a:spcAft>
-                <a:spcPts val="600"/>
-              </a:spcAft>
-            </a:pPr>
-            <a:r>
-              <a:rPr sz="1500">
-                <a:solidFill>
-                  <a:srgbClr val="22282E"/>
-                </a:solidFill>
-              </a:rPr>
-              <a:t>•  Construye a mano una petición de smuggling CL.TE.</a:t>
-            </a:r>
-          </a:p>
-          <a:p>
-            <a:pPr>
-              <a:spcAft>
-                <a:spcPts val="600"/>
-              </a:spcAft>
-            </a:pPr>
-            <a:r>
-              <a:rPr sz="1500">
-                <a:solidFill>
-                  <a:srgbClr val="22282E"/>
-                </a:solidFill>
-              </a:rPr>
-              <a:t>•  Explica cómo HTTP/2 end-to-end mitiga el smuggling clásico.</a:t>
-            </a:r>
-          </a:p>
-          <a:p>
-            <a:pPr>
-              <a:spcAft>
-                <a:spcPts val="600"/>
-              </a:spcAft>
-            </a:pPr>
-            <a:r>
-              <a:rPr sz="1500">
-                <a:solidFill>
-                  <a:srgbClr val="22282E"/>
-                </a:solidFill>
-              </a:rPr>
-              <a:t>•  Propón defensas: normalización en el frontend y rechazo de peticiones ambiguas.</a:t>
+              <a:t>•  PortSwigger labs de request smuggling y cache poisoning.</a:t>
+            </a:r>
+          </a:p>
+          <a:p>
+            <a:pPr>
+              <a:spcAft>
+                <a:spcPts val="600"/>
+              </a:spcAft>
+            </a:pPr>
+            <a:r>
+              <a:rPr sz="1500">
+                <a:solidFill>
+                  <a:srgbClr val="22282E"/>
+                </a:solidFill>
+              </a:rPr>
+              <a:t>•  Burp con la extensión HTTP Request Smuggler y Param Miner.</a:t>
+            </a:r>
+          </a:p>
+          <a:p>
+            <a:pPr>
+              <a:spcAft>
+                <a:spcPts val="600"/>
+              </a:spcAft>
+            </a:pPr>
+            <a:r>
+              <a:rPr sz="1500">
+                <a:solidFill>
+                  <a:srgbClr val="22282E"/>
+                </a:solidFill>
+              </a:rPr>
+              <a:t>•  Comprensión de HTTP/1.1 y HTTP/2.</a:t>
             </a:r>
           </a:p>
         </p:txBody>
@@ -4703,7 +5064,7 @@
                   <a:srgbClr val="0B3D2E"/>
                 </a:solidFill>
               </a:rPr>
-              <a:t>📝 Reto verificable</a:t>
+              <a:t>🧪 Laboratorio guiado</a:t>
             </a:r>
           </a:p>
         </p:txBody>
@@ -4741,22 +5102,97 @@
                   <a:srgbClr val="22282E"/>
                 </a:solidFill>
               </a:rPr>
-              <a:t>•  Resuelve un lab de HTTP request smuggling de PortSwigger (CL.TE o TE.CL) y un lab de cache poisoning, demostrando impacto en ambos.</a:t>
-            </a:r>
-          </a:p>
-          <a:p>
-            <a:pPr>
-              <a:spcAft>
-                <a:spcPts val="600"/>
-              </a:spcAft>
-            </a:pPr>
-            <a:r>
-              <a:rPr sz="1500">
-                <a:solidFill>
-                  <a:srgbClr val="22282E"/>
-                </a:solidFill>
-              </a:rPr>
-              <a:t>•  Criterio de aceptación: ambos labs quedan resueltos, entregas las peticiones exactas (cabeceras conflictivas / input unkeyed), la evidencia del impacto y la defensa correspondiente.</a:t>
+              <a:t>•  Cache poisoning: usa Param Miner para descubrir cabeceras no incluidas en la clave (unkeyed).</a:t>
+            </a:r>
+          </a:p>
+          <a:p>
+            <a:pPr>
+              <a:spcAft>
+                <a:spcPts val="600"/>
+              </a:spcAft>
+            </a:pPr>
+            <a:r>
+              <a:rPr sz="1500">
+                <a:solidFill>
+                  <a:srgbClr val="22282E"/>
+                </a:solidFill>
+              </a:rPr>
+              <a:t>•  Inyecta un valor malicioso en esa cabecera y comprueba si se refleja y se cachea.</a:t>
+            </a:r>
+          </a:p>
+          <a:p>
+            <a:pPr>
+              <a:spcAft>
+                <a:spcPts val="600"/>
+              </a:spcAft>
+            </a:pPr>
+            <a:r>
+              <a:rPr sz="1500">
+                <a:solidFill>
+                  <a:srgbClr val="22282E"/>
+                </a:solidFill>
+              </a:rPr>
+              <a:t>•  Verifica el envenenamiento accediendo a la URL sin la cabecera (recibes el contenido inyectado).</a:t>
+            </a:r>
+          </a:p>
+          <a:p>
+            <a:pPr>
+              <a:spcAft>
+                <a:spcPts val="600"/>
+              </a:spcAft>
+            </a:pPr>
+            <a:r>
+              <a:rPr sz="1500">
+                <a:solidFill>
+                  <a:srgbClr val="22282E"/>
+                </a:solidFill>
+              </a:rPr>
+              <a:t>•  Request smuggling: con HTTP Request Smuggler, detecta la desincronización (CL.TE/TE.CL).</a:t>
+            </a:r>
+          </a:p>
+          <a:p>
+            <a:pPr>
+              <a:spcAft>
+                <a:spcPts val="600"/>
+              </a:spcAft>
+            </a:pPr>
+            <a:r>
+              <a:rPr sz="1500">
+                <a:solidFill>
+                  <a:srgbClr val="22282E"/>
+                </a:solidFill>
+              </a:rPr>
+              <a:t>•  Construye manualmente una petición con Content-Length y Transfer-Encoding conflictivos para "contrabandear" una segunda petición.</a:t>
+            </a:r>
+          </a:p>
+          <a:p>
+            <a:pPr>
+              <a:spcAft>
+                <a:spcPts val="600"/>
+              </a:spcAft>
+            </a:pPr>
+            <a:r>
+              <a:rPr sz="1500">
+                <a:solidFill>
+                  <a:srgbClr val="22282E"/>
+                </a:solidFill>
+              </a:rPr>
+              <a:t>•  Demuestra el impacto: captura la petición de otro usuario o envenena la cola de respuestas en el lab.</a:t>
+            </a:r>
+          </a:p>
+          <a:p>
+            <a:pPr>
+              <a:spcAft>
+                <a:spcPts val="600"/>
+              </a:spcAft>
+            </a:pPr>
+            <a:r>
+              <a:rPr sz="1500">
+                <a:solidFill>
+                  <a:srgbClr val="22282E"/>
+                </a:solidFill>
+              </a:rPr>
+              <a:t>•  Documenta el tipo de desincronización, el payload y el impacto.</a:t>
             </a:r>
           </a:p>
         </p:txBody>
